--- a/CV1711-WEEK9.pptx
+++ b/CV1711-WEEK9.pptx
@@ -146,7 +146,7 @@
   <pc:docChgLst>
     <pc:chgData name="#CUI SHUAIWEN#" userId="35a196ea-bcb8-475e-86cf-0b9eaca8a48f" providerId="ADAL" clId="{4D8D382B-DDFF-455F-B5ED-E854E938891F}"/>
     <pc:docChg chg="undo custSel addSld delSld modSld sldOrd">
-      <pc:chgData name="#CUI SHUAIWEN#" userId="35a196ea-bcb8-475e-86cf-0b9eaca8a48f" providerId="ADAL" clId="{4D8D382B-DDFF-455F-B5ED-E854E938891F}" dt="2026-03-16T11:45:44.481" v="1067" actId="14100"/>
+      <pc:chgData name="#CUI SHUAIWEN#" userId="35a196ea-bcb8-475e-86cf-0b9eaca8a48f" providerId="ADAL" clId="{4D8D382B-DDFF-455F-B5ED-E854E938891F}" dt="2026-03-16T11:50:35.237" v="1086" actId="1076"/>
       <pc:docMkLst>
         <pc:docMk/>
       </pc:docMkLst>
@@ -198,13 +198,13 @@
         </pc:spChg>
       </pc:sldChg>
       <pc:sldChg chg="addSp delSp modSp add mod">
-        <pc:chgData name="#CUI SHUAIWEN#" userId="35a196ea-bcb8-475e-86cf-0b9eaca8a48f" providerId="ADAL" clId="{4D8D382B-DDFF-455F-B5ED-E854E938891F}" dt="2026-03-10T12:43:57.452" v="853" actId="1076"/>
+        <pc:chgData name="#CUI SHUAIWEN#" userId="35a196ea-bcb8-475e-86cf-0b9eaca8a48f" providerId="ADAL" clId="{4D8D382B-DDFF-455F-B5ED-E854E938891F}" dt="2026-03-16T11:50:35.237" v="1086" actId="1076"/>
         <pc:sldMkLst>
           <pc:docMk/>
           <pc:sldMk cId="2224933946" sldId="304"/>
         </pc:sldMkLst>
         <pc:spChg chg="mod">
-          <ac:chgData name="#CUI SHUAIWEN#" userId="35a196ea-bcb8-475e-86cf-0b9eaca8a48f" providerId="ADAL" clId="{4D8D382B-DDFF-455F-B5ED-E854E938891F}" dt="2026-03-10T12:43:27.126" v="842" actId="1076"/>
+          <ac:chgData name="#CUI SHUAIWEN#" userId="35a196ea-bcb8-475e-86cf-0b9eaca8a48f" providerId="ADAL" clId="{4D8D382B-DDFF-455F-B5ED-E854E938891F}" dt="2026-03-16T11:50:06.422" v="1075" actId="1076"/>
           <ac:spMkLst>
             <pc:docMk/>
             <pc:sldMk cId="2224933946" sldId="304"/>
@@ -212,7 +212,7 @@
           </ac:spMkLst>
         </pc:spChg>
         <pc:spChg chg="mod">
-          <ac:chgData name="#CUI SHUAIWEN#" userId="35a196ea-bcb8-475e-86cf-0b9eaca8a48f" providerId="ADAL" clId="{4D8D382B-DDFF-455F-B5ED-E854E938891F}" dt="2026-03-10T12:43:55.240" v="852" actId="1076"/>
+          <ac:chgData name="#CUI SHUAIWEN#" userId="35a196ea-bcb8-475e-86cf-0b9eaca8a48f" providerId="ADAL" clId="{4D8D382B-DDFF-455F-B5ED-E854E938891F}" dt="2026-03-16T11:50:32.044" v="1085" actId="1076"/>
           <ac:spMkLst>
             <pc:docMk/>
             <pc:sldMk cId="2224933946" sldId="304"/>
@@ -220,7 +220,15 @@
           </ac:spMkLst>
         </pc:spChg>
         <pc:picChg chg="add mod ord">
-          <ac:chgData name="#CUI SHUAIWEN#" userId="35a196ea-bcb8-475e-86cf-0b9eaca8a48f" providerId="ADAL" clId="{4D8D382B-DDFF-455F-B5ED-E854E938891F}" dt="2026-03-10T12:43:24.492" v="841" actId="14100"/>
+          <ac:chgData name="#CUI SHUAIWEN#" userId="35a196ea-bcb8-475e-86cf-0b9eaca8a48f" providerId="ADAL" clId="{4D8D382B-DDFF-455F-B5ED-E854E938891F}" dt="2026-03-16T11:50:03.789" v="1074" actId="1076"/>
+          <ac:picMkLst>
+            <pc:docMk/>
+            <pc:sldMk cId="2224933946" sldId="304"/>
+            <ac:picMk id="3" creationId="{809C0B16-D457-608F-19EE-36DE146FA094}"/>
+          </ac:picMkLst>
+        </pc:picChg>
+        <pc:picChg chg="add del mod ord">
+          <ac:chgData name="#CUI SHUAIWEN#" userId="35a196ea-bcb8-475e-86cf-0b9eaca8a48f" providerId="ADAL" clId="{4D8D382B-DDFF-455F-B5ED-E854E938891F}" dt="2026-03-16T11:49:51.759" v="1068" actId="478"/>
           <ac:picMkLst>
             <pc:docMk/>
             <pc:sldMk cId="2224933946" sldId="304"/>
@@ -228,7 +236,15 @@
           </ac:picMkLst>
         </pc:picChg>
         <pc:picChg chg="add mod ord">
-          <ac:chgData name="#CUI SHUAIWEN#" userId="35a196ea-bcb8-475e-86cf-0b9eaca8a48f" providerId="ADAL" clId="{4D8D382B-DDFF-455F-B5ED-E854E938891F}" dt="2026-03-10T12:43:52.107" v="851" actId="14100"/>
+          <ac:chgData name="#CUI SHUAIWEN#" userId="35a196ea-bcb8-475e-86cf-0b9eaca8a48f" providerId="ADAL" clId="{4D8D382B-DDFF-455F-B5ED-E854E938891F}" dt="2026-03-16T11:50:21.322" v="1081" actId="167"/>
+          <ac:picMkLst>
+            <pc:docMk/>
+            <pc:sldMk cId="2224933946" sldId="304"/>
+            <ac:picMk id="8" creationId="{B8A90FD0-4827-2E98-7D6B-6D2F7B37892A}"/>
+          </ac:picMkLst>
+        </pc:picChg>
+        <pc:picChg chg="add del mod ord">
+          <ac:chgData name="#CUI SHUAIWEN#" userId="35a196ea-bcb8-475e-86cf-0b9eaca8a48f" providerId="ADAL" clId="{4D8D382B-DDFF-455F-B5ED-E854E938891F}" dt="2026-03-16T11:49:52.257" v="1069" actId="478"/>
           <ac:picMkLst>
             <pc:docMk/>
             <pc:sldMk cId="2224933946" sldId="304"/>
@@ -236,7 +252,7 @@
           </ac:picMkLst>
         </pc:picChg>
         <pc:cxnChg chg="mod">
-          <ac:chgData name="#CUI SHUAIWEN#" userId="35a196ea-bcb8-475e-86cf-0b9eaca8a48f" providerId="ADAL" clId="{4D8D382B-DDFF-455F-B5ED-E854E938891F}" dt="2026-03-10T12:43:29.121" v="843" actId="1076"/>
+          <ac:chgData name="#CUI SHUAIWEN#" userId="35a196ea-bcb8-475e-86cf-0b9eaca8a48f" providerId="ADAL" clId="{4D8D382B-DDFF-455F-B5ED-E854E938891F}" dt="2026-03-16T11:50:35.237" v="1086" actId="1076"/>
           <ac:cxnSpMkLst>
             <pc:docMk/>
             <pc:sldMk cId="2224933946" sldId="304"/>
@@ -244,7 +260,7 @@
           </ac:cxnSpMkLst>
         </pc:cxnChg>
         <pc:cxnChg chg="mod">
-          <ac:chgData name="#CUI SHUAIWEN#" userId="35a196ea-bcb8-475e-86cf-0b9eaca8a48f" providerId="ADAL" clId="{4D8D382B-DDFF-455F-B5ED-E854E938891F}" dt="2026-03-10T12:43:57.452" v="853" actId="1076"/>
+          <ac:chgData name="#CUI SHUAIWEN#" userId="35a196ea-bcb8-475e-86cf-0b9eaca8a48f" providerId="ADAL" clId="{4D8D382B-DDFF-455F-B5ED-E854E938891F}" dt="2026-03-16T11:50:29.611" v="1084" actId="1076"/>
           <ac:cxnSpMkLst>
             <pc:docMk/>
             <pc:sldMk cId="2224933946" sldId="304"/>
@@ -5132,10 +5148,10 @@
       </p:grpSpPr>
       <p:pic>
         <p:nvPicPr>
-          <p:cNvPr id="9" name="Picture 8">
+          <p:cNvPr id="8" name="Picture 7">
             <a:extLst>
               <a:ext uri="{FF2B5EF4-FFF2-40B4-BE49-F238E27FC236}">
-                <a16:creationId xmlns:a16="http://schemas.microsoft.com/office/drawing/2014/main" id="{61D65DAE-7EFF-1C13-A85F-6D64B4FB18E8}"/>
+                <a16:creationId xmlns:a16="http://schemas.microsoft.com/office/drawing/2014/main" id="{B8A90FD0-4827-2E98-7D6B-6D2F7B37892A}"/>
               </a:ext>
             </a:extLst>
           </p:cNvPr>
@@ -5152,8 +5168,8 @@
         </p:blipFill>
         <p:spPr>
           <a:xfrm>
-            <a:off x="6153972" y="489900"/>
-            <a:ext cx="1972266" cy="4287960"/>
+            <a:off x="6058853" y="644013"/>
+            <a:ext cx="1773342" cy="3855474"/>
           </a:xfrm>
           <a:prstGeom prst="rect">
             <a:avLst/>
@@ -5162,10 +5178,10 @@
       </p:pic>
       <p:pic>
         <p:nvPicPr>
-          <p:cNvPr id="5" name="Picture 4">
+          <p:cNvPr id="3" name="Picture 2">
             <a:extLst>
               <a:ext uri="{FF2B5EF4-FFF2-40B4-BE49-F238E27FC236}">
-                <a16:creationId xmlns:a16="http://schemas.microsoft.com/office/drawing/2014/main" id="{F36B151F-D300-1C62-7C9F-0B98C7FB0183}"/>
+                <a16:creationId xmlns:a16="http://schemas.microsoft.com/office/drawing/2014/main" id="{809C0B16-D457-608F-19EE-36DE146FA094}"/>
               </a:ext>
             </a:extLst>
           </p:cNvPr>
@@ -5182,8 +5198,8 @@
         </p:blipFill>
         <p:spPr>
           <a:xfrm>
-            <a:off x="3501778" y="489900"/>
-            <a:ext cx="1972265" cy="4287960"/>
+            <a:off x="3535143" y="644013"/>
+            <a:ext cx="1773342" cy="3855474"/>
           </a:xfrm>
           <a:prstGeom prst="rect">
             <a:avLst/>
@@ -5270,7 +5286,7 @@
         </p:nvSpPr>
         <p:spPr>
           <a:xfrm>
-            <a:off x="3649133" y="4086496"/>
+            <a:off x="3649133" y="3960130"/>
             <a:ext cx="1032701" cy="211667"/>
           </a:xfrm>
           <a:prstGeom prst="roundRect">
@@ -5320,7 +5336,7 @@
         </p:nvSpPr>
         <p:spPr>
           <a:xfrm>
-            <a:off x="6765576" y="3409271"/>
+            <a:off x="6648886" y="3242330"/>
             <a:ext cx="1032701" cy="211667"/>
           </a:xfrm>
           <a:prstGeom prst="roundRect">
@@ -5370,7 +5386,7 @@
         </p:nvCxnSpPr>
         <p:spPr>
           <a:xfrm flipH="1">
-            <a:off x="4681834" y="3717108"/>
+            <a:off x="4701184" y="3717108"/>
             <a:ext cx="355833" cy="338667"/>
           </a:xfrm>
           <a:prstGeom prst="straightConnector1">
@@ -5412,7 +5428,7 @@
         </p:nvCxnSpPr>
         <p:spPr>
           <a:xfrm flipH="1">
-            <a:off x="7756469" y="3070604"/>
+            <a:off x="7737605" y="3009497"/>
             <a:ext cx="355833" cy="338667"/>
           </a:xfrm>
           <a:prstGeom prst="straightConnector1">
@@ -6103,6 +6119,15 @@
 </file>
 
 <file path=customXml/item2.xml><?xml version="1.0" encoding="utf-8"?>
+<?mso-contentType ?>
+<FormTemplates xmlns="http://schemas.microsoft.com/sharepoint/v3/contenttype/forms">
+  <Display>DocumentLibraryForm</Display>
+  <Edit>DocumentLibraryForm</Edit>
+  <New>DocumentLibraryForm</New>
+</FormTemplates>
+</file>
+
+<file path=customXml/item3.xml><?xml version="1.0" encoding="utf-8"?>
 <ct:contentTypeSchema xmlns:ct="http://schemas.microsoft.com/office/2006/metadata/contentType" xmlns:ma="http://schemas.microsoft.com/office/2006/metadata/properties/metaAttributes" ct:_="" ma:_="" ma:contentTypeName="Document" ma:contentTypeID="0x010100E28E816AC679FF4C86C22834E825BD05" ma:contentTypeVersion="1" ma:contentTypeDescription="Create a new document." ma:contentTypeScope="" ma:versionID="066e42d507d75a122d0db91dd470f30a">
   <xsd:schema xmlns:xsd="http://www.w3.org/2001/XMLSchema" xmlns:xs="http://www.w3.org/2001/XMLSchema" xmlns:p="http://schemas.microsoft.com/office/2006/metadata/properties" xmlns:ns1="http://schemas.microsoft.com/sharepoint/v3" targetNamespace="http://schemas.microsoft.com/office/2006/metadata/properties" ma:root="true" ma:fieldsID="48c5b5cd9b8d25ff6dd15848836f4270" ns1:_="">
     <xsd:import namespace="http://schemas.microsoft.com/sharepoint/v3"/>
@@ -6234,15 +6259,6 @@
 </ct:contentTypeSchema>
 </file>
 
-<file path=customXml/item3.xml><?xml version="1.0" encoding="utf-8"?>
-<?mso-contentType ?>
-<FormTemplates xmlns="http://schemas.microsoft.com/sharepoint/v3/contenttype/forms">
-  <Display>DocumentLibraryForm</Display>
-  <Edit>DocumentLibraryForm</Edit>
-  <New>DocumentLibraryForm</New>
-</FormTemplates>
-</file>
-
 <file path=customXml/itemProps1.xml><?xml version="1.0" encoding="utf-8"?>
 <ds:datastoreItem xmlns:ds="http://schemas.openxmlformats.org/officeDocument/2006/customXml" ds:itemID="{264D3FE7-A0C8-4453-A806-BCAD6F53B901}">
   <ds:schemaRefs>
@@ -6254,6 +6270,14 @@
 </file>
 
 <file path=customXml/itemProps2.xml><?xml version="1.0" encoding="utf-8"?>
+<ds:datastoreItem xmlns:ds="http://schemas.openxmlformats.org/officeDocument/2006/customXml" ds:itemID="{6CCB8030-6F99-446F-BD3B-E5E3F435F1FD}">
+  <ds:schemaRefs>
+    <ds:schemaRef ds:uri="http://schemas.microsoft.com/sharepoint/v3/contenttype/forms"/>
+  </ds:schemaRefs>
+</ds:datastoreItem>
+</file>
+
+<file path=customXml/itemProps3.xml><?xml version="1.0" encoding="utf-8"?>
 <ds:datastoreItem xmlns:ds="http://schemas.openxmlformats.org/officeDocument/2006/customXml" ds:itemID="{AFA540F8-4ACB-4DC8-920F-A3CE5A42B988}">
   <ds:schemaRefs>
     <ds:schemaRef ds:uri="http://schemas.microsoft.com/office/2006/metadata/contentType"/>
@@ -6271,14 +6295,6 @@
 </ds:datastoreItem>
 </file>
 
-<file path=customXml/itemProps3.xml><?xml version="1.0" encoding="utf-8"?>
-<ds:datastoreItem xmlns:ds="http://schemas.openxmlformats.org/officeDocument/2006/customXml" ds:itemID="{6CCB8030-6F99-446F-BD3B-E5E3F435F1FD}">
-  <ds:schemaRefs>
-    <ds:schemaRef ds:uri="http://schemas.microsoft.com/sharepoint/v3/contenttype/forms"/>
-  </ds:schemaRefs>
-</ds:datastoreItem>
-</file>
-
 <file path=docMetadata/LabelInfo.xml><?xml version="1.0" encoding="utf-8"?>
 <clbl:labelList xmlns:clbl="http://schemas.microsoft.com/office/2020/mipLabelMetadata">
   <clbl:label id="{15ce9348-be2a-462b-8fc0-e1765a9b204a}" enabled="0" method="" siteId="{15ce9348-be2a-462b-8fc0-e1765a9b204a}" removed="1"/>
